--- a/public/fun/pack/pptx/talkpro/발표템플릿프리미엄_36_사업제안_앰버스모크.pptx
+++ b/public/fun/pack/pptx/talkpro/발표템플릿프리미엄_36_사업제안_앰버스모크.pptx
@@ -115,12 +115,12 @@
   <p:extLst>
     <p:ext uri="{521415D9-36F7-43E2-AB2F-B90AF26B5E84}">
       <p14:sectionLst xmlns:p14="http://schemas.microsoft.com/office/powerpoint/2010/main">
-        <p14:section name="시작" id="{2C2731BF-1B31-49D5-8DA5-86548B0579E5}">
+        <p14:section name="시작" id="{CB28F4F6-A32B-4DEE-8B0E-B44D43E2C6D4}">
           <p14:sldIdLst>
             <p14:sldId id="256"/>
           </p14:sldIdLst>
         </p14:section>
-        <p14:section name="본문" id="{FC7D2C9E-0FBA-4F6B-85EB-7952C70EEDEF}">
+        <p14:section name="본문" id="{6E6502A8-1961-402F-8ED3-F6AA7C6677EC}">
           <p14:sldIdLst>
             <p14:sldId id="257"/>
             <p14:sldId id="258"/>
@@ -131,7 +131,7 @@
             <p14:sldId id="263"/>
           </p14:sldIdLst>
         </p14:section>
-        <p14:section name="마무리" id="{CD9498FA-C569-4977-9559-0A1E73BF527E}">
+        <p14:section name="마무리" id="{D3D06D00-8549-4D20-B872-67E937A41B1B}">
           <p14:sldIdLst>
             <p14:sldId id="264"/>
           </p14:sldIdLst>
@@ -1829,7 +1829,7 @@
             </a:lvl1pPr>
           </a:lstStyle>
           <a:p>
-            <a:fld id="{84CA5110-45D5-4AEA-924D-A98820A5118E}" type="slidenum">
+            <a:fld id="{C6E0B060-10D9-4E20-9349-B61D9CC19A2B}" type="slidenum">
               <a:rPr lang="en-US"/>
               <a:t>‹#›</a:t>
             </a:fld>
@@ -2504,7 +2504,7 @@
             </a:lvl1pPr>
           </a:lstStyle>
           <a:p>
-            <a:fld id="{BBAB08E5-C8CA-4D53-AE69-A1F3E6960644}" type="slidenum">
+            <a:fld id="{666D3574-23EA-4595-9195-CBBD51A070A6}" type="slidenum">
               <a:rPr lang="en-US"/>
               <a:t>‹#›</a:t>
             </a:fld>
@@ -3253,7 +3253,7 @@
             </a:lvl1pPr>
           </a:lstStyle>
           <a:p>
-            <a:fld id="{32E48D9B-645E-4AAE-B813-441D21AC463E}" type="slidenum">
+            <a:fld id="{770DAE8D-69C9-4EBE-909C-790F46ABB482}" type="slidenum">
               <a:rPr lang="en-US"/>
               <a:t>‹#›</a:t>
             </a:fld>
@@ -4116,7 +4116,7 @@
           <a:p>
             <a:r>
               <a:rPr lang="ko-KR"/>
-              <a:t>가을 개편에 맞춰 준비한 제안입니다</a:t>
+              <a:t>개편에 맞춰 준비한 제안입니다</a:t>
             </a:r>
           </a:p>
         </p:txBody>
@@ -4144,7 +4144,7 @@
           <a:p>
             <a:r>
               <a:rPr lang="ko-KR"/>
-              <a:t>0000. 00. 00</a:t>
+              <a:t>날짜 입력</a:t>
             </a:r>
           </a:p>
         </p:txBody>
@@ -4251,7 +4251,7 @@
           <a:bodyPr/>
           <a:lstStyle/>
           <a:p>
-            <a:fld id="{0C0E1B03-50A5-400E-8FC4-C914FEB2F245}" type="slidenum">
+            <a:fld id="{FDD58F30-1215-405B-A3DD-6911D2C176F9}" type="slidenum">
               <a:rPr lang="en-US"/>
               <a:t>‹#›</a:t>
             </a:fld>
@@ -5475,7 +5475,7 @@
           <a:bodyPr/>
           <a:lstStyle/>
           <a:p>
-            <a:fld id="{7D2FDF87-9883-4FE9-98CE-AD858B50906B}" type="slidenum">
+            <a:fld id="{B6A5E317-2155-4827-88A5-EF212B9B4762}" type="slidenum">
               <a:rPr lang="en-US"/>
               <a:t>‹#›</a:t>
             </a:fld>
@@ -5585,7 +5585,7 @@
           <a:bodyPr/>
           <a:lstStyle/>
           <a:p>
-            <a:fld id="{7565FA3C-FD1B-4DDD-9FD8-26BF689BF40B}" type="slidenum">
+            <a:fld id="{0586A5DE-3E86-4AB5-BDBF-5D589C2C539A}" type="slidenum">
               <a:rPr lang="en-US"/>
               <a:t>‹#›</a:t>
             </a:fld>
@@ -6580,7 +6580,7 @@
           <a:bodyPr/>
           <a:lstStyle/>
           <a:p>
-            <a:fld id="{7EF2209E-97B8-4FB2-9854-C1A2F1736519}" type="slidenum">
+            <a:fld id="{FD72F13A-2838-4F92-94A7-A1FA18ABA3FE}" type="slidenum">
               <a:rPr lang="en-US"/>
               <a:t>‹#›</a:t>
             </a:fld>
@@ -7250,7 +7250,7 @@
           <a:bodyPr/>
           <a:lstStyle/>
           <a:p>
-            <a:fld id="{8877DC67-B79B-4A8C-8ABF-6E93227B05ED}" type="slidenum">
+            <a:fld id="{717DEB27-B804-42CB-8E9A-13DDC8620522}" type="slidenum">
               <a:rPr lang="en-US"/>
               <a:t>‹#›</a:t>
             </a:fld>
@@ -7452,7 +7452,7 @@
           <a:bodyPr/>
           <a:lstStyle/>
           <a:p>
-            <a:fld id="{82D2701C-0F5D-4B09-BCEC-9A195A2B088B}" type="slidenum">
+            <a:fld id="{5EFC0581-C441-48A3-88FF-959F3BE01C51}" type="slidenum">
               <a:rPr lang="en-US"/>
               <a:t>‹#›</a:t>
             </a:fld>
@@ -8538,7 +8538,7 @@
           <a:bodyPr/>
           <a:lstStyle/>
           <a:p>
-            <a:fld id="{94C132B2-6FA7-4660-AC22-DEC7CAF794A4}" type="slidenum">
+            <a:fld id="{CDAB92CD-0615-42DE-9B83-586597DBDE19}" type="slidenum">
               <a:rPr lang="en-US"/>
               <a:t>‹#›</a:t>
             </a:fld>
